--- a/EcommerceProject practice.pptx
+++ b/EcommerceProject practice.pptx
@@ -3815,6 +3815,86 @@
             <a:r>
               <a:rPr lang="en-US" dirty="0" err="1"/>
               <a:t>transpiling</a:t>
+            </a:r>
+            <a:endParaRPr lang="en-US" dirty="0"/>
+          </a:p>
+        </p:txBody>
+      </p:sp>
+      <p:sp>
+        <p:nvSpPr>
+          <p:cNvPr id="6" name="TextBox 5">
+            <a:extLst>
+              <a:ext uri="{FF2B5EF4-FFF2-40B4-BE49-F238E27FC236}">
+                <a16:creationId xmlns:a16="http://schemas.microsoft.com/office/drawing/2014/main" id="{8EA7558B-F6B3-1EEB-58D5-81B4E421E504}"/>
+              </a:ext>
+            </a:extLst>
+          </p:cNvPr>
+          <p:cNvSpPr txBox="1"/>
+          <p:nvPr/>
+        </p:nvSpPr>
+        <p:spPr>
+          <a:xfrm>
+            <a:off x="409432" y="2253243"/>
+            <a:ext cx="6307048" cy="646331"/>
+          </a:xfrm>
+          <a:prstGeom prst="rect">
+            <a:avLst/>
+          </a:prstGeom>
+          <a:noFill/>
+        </p:spPr>
+        <p:txBody>
+          <a:bodyPr wrap="square" rtlCol="0">
+            <a:spAutoFit/>
+          </a:bodyPr>
+          <a:lstStyle/>
+          <a:p>
+            <a:r>
+              <a:rPr lang="en-US" dirty="0" err="1"/>
+              <a:t>tsc</a:t>
+            </a:r>
+            <a:r>
+              <a:rPr lang="en-US" dirty="0"/>
+              <a:t> –</a:t>
+            </a:r>
+            <a:r>
+              <a:rPr lang="en-US" dirty="0" err="1"/>
+              <a:t>noEmitOnError</a:t>
+            </a:r>
+            <a:r>
+              <a:rPr lang="en-US" dirty="0"/>
+              <a:t>  </a:t>
+            </a:r>
+            <a:r>
+              <a:rPr lang="en-US" dirty="0" err="1"/>
+              <a:t>filename.ts</a:t>
+            </a:r>
+            <a:r>
+              <a:rPr lang="en-US" dirty="0"/>
+              <a:t>  </a:t>
+            </a:r>
+            <a:r>
+              <a:rPr lang="en-US" dirty="0">
+                <a:sym typeface="Wingdings" panose="05000000000000000000" pitchFamily="2" charset="2"/>
+              </a:rPr>
+              <a:t> to avoid the .</a:t>
+            </a:r>
+            <a:r>
+              <a:rPr lang="en-US" dirty="0" err="1">
+                <a:sym typeface="Wingdings" panose="05000000000000000000" pitchFamily="2" charset="2"/>
+              </a:rPr>
+              <a:t>js</a:t>
+            </a:r>
+            <a:r>
+              <a:rPr lang="en-US" dirty="0">
+                <a:sym typeface="Wingdings" panose="05000000000000000000" pitchFamily="2" charset="2"/>
+              </a:rPr>
+              <a:t> file in case </a:t>
+            </a:r>
+            <a:r>
+              <a:rPr lang="en-US">
+                <a:sym typeface="Wingdings" panose="05000000000000000000" pitchFamily="2" charset="2"/>
+              </a:rPr>
+              <a:t>of compilation errors occur.</a:t>
             </a:r>
             <a:endParaRPr lang="en-US" dirty="0"/>
           </a:p>

--- a/EcommerceProject practice.pptx
+++ b/EcommerceProject practice.pptx
@@ -3888,13 +3888,73 @@
               <a:rPr lang="en-US" dirty="0">
                 <a:sym typeface="Wingdings" panose="05000000000000000000" pitchFamily="2" charset="2"/>
               </a:rPr>
-              <a:t> file in case </a:t>
-            </a:r>
-            <a:r>
-              <a:rPr lang="en-US">
+              <a:t> file in case of compilation errors occur.</a:t>
+            </a:r>
+            <a:endParaRPr lang="en-US" dirty="0"/>
+          </a:p>
+        </p:txBody>
+      </p:sp>
+      <p:sp>
+        <p:nvSpPr>
+          <p:cNvPr id="7" name="TextBox 6">
+            <a:extLst>
+              <a:ext uri="{FF2B5EF4-FFF2-40B4-BE49-F238E27FC236}">
+                <a16:creationId xmlns:a16="http://schemas.microsoft.com/office/drawing/2014/main" id="{9EC0CA3E-8601-8EC5-10E4-DE46BC65A654}"/>
+              </a:ext>
+            </a:extLst>
+          </p:cNvPr>
+          <p:cNvSpPr txBox="1"/>
+          <p:nvPr/>
+        </p:nvSpPr>
+        <p:spPr>
+          <a:xfrm>
+            <a:off x="409432" y="3312095"/>
+            <a:ext cx="4722126" cy="369332"/>
+          </a:xfrm>
+          <a:prstGeom prst="rect">
+            <a:avLst/>
+          </a:prstGeom>
+          <a:noFill/>
+        </p:spPr>
+        <p:txBody>
+          <a:bodyPr wrap="square" rtlCol="0">
+            <a:spAutoFit/>
+          </a:bodyPr>
+          <a:lstStyle/>
+          <a:p>
+            <a:r>
+              <a:rPr lang="en-US" dirty="0" err="1"/>
+              <a:t>tsc</a:t>
+            </a:r>
+            <a:r>
+              <a:rPr lang="en-US" dirty="0"/>
+              <a:t> –</a:t>
+            </a:r>
+            <a:r>
+              <a:rPr lang="en-US" dirty="0" err="1"/>
+              <a:t>init</a:t>
+            </a:r>
+            <a:r>
+              <a:rPr lang="en-US" dirty="0"/>
+              <a:t>  </a:t>
+            </a:r>
+            <a:r>
+              <a:rPr lang="en-US" dirty="0">
                 <a:sym typeface="Wingdings" panose="05000000000000000000" pitchFamily="2" charset="2"/>
               </a:rPr>
-              <a:t>of compilation errors occur.</a:t>
+              <a:t> to generate the </a:t>
+            </a:r>
+            <a:r>
+              <a:rPr lang="en-US" dirty="0" err="1">
+                <a:sym typeface="Wingdings" panose="05000000000000000000" pitchFamily="2" charset="2"/>
+              </a:rPr>
+              <a:t>tsconfig.json</a:t>
+            </a:r>
+            <a:r>
+              <a:rPr lang="en-US" dirty="0">
+                <a:sym typeface="Wingdings" panose="05000000000000000000" pitchFamily="2" charset="2"/>
+              </a:rPr>
+              <a:t> file</a:t>
             </a:r>
             <a:endParaRPr lang="en-US" dirty="0"/>
           </a:p>

--- a/EcommerceProject practice.pptx
+++ b/EcommerceProject practice.pptx
@@ -346,7 +346,7 @@
           <a:p>
             <a:fld id="{2D1FB5FC-1629-4A0D-9573-785FAC7ED015}" type="datetimeFigureOut">
               <a:rPr lang="en-US" smtClean="0"/>
-              <a:t>6/8/2026</a:t>
+              <a:t>6/13/2026</a:t>
             </a:fld>
             <a:endParaRPr lang="en-US"/>
           </a:p>
@@ -516,7 +516,7 @@
           <a:p>
             <a:fld id="{2D1FB5FC-1629-4A0D-9573-785FAC7ED015}" type="datetimeFigureOut">
               <a:rPr lang="en-US" smtClean="0"/>
-              <a:t>6/8/2026</a:t>
+              <a:t>6/13/2026</a:t>
             </a:fld>
             <a:endParaRPr lang="en-US"/>
           </a:p>
@@ -696,7 +696,7 @@
           <a:p>
             <a:fld id="{2D1FB5FC-1629-4A0D-9573-785FAC7ED015}" type="datetimeFigureOut">
               <a:rPr lang="en-US" smtClean="0"/>
-              <a:t>6/8/2026</a:t>
+              <a:t>6/13/2026</a:t>
             </a:fld>
             <a:endParaRPr lang="en-US"/>
           </a:p>
@@ -866,7 +866,7 @@
           <a:p>
             <a:fld id="{2D1FB5FC-1629-4A0D-9573-785FAC7ED015}" type="datetimeFigureOut">
               <a:rPr lang="en-US" smtClean="0"/>
-              <a:t>6/8/2026</a:t>
+              <a:t>6/13/2026</a:t>
             </a:fld>
             <a:endParaRPr lang="en-US"/>
           </a:p>
@@ -1112,7 +1112,7 @@
           <a:p>
             <a:fld id="{2D1FB5FC-1629-4A0D-9573-785FAC7ED015}" type="datetimeFigureOut">
               <a:rPr lang="en-US" smtClean="0"/>
-              <a:t>6/8/2026</a:t>
+              <a:t>6/13/2026</a:t>
             </a:fld>
             <a:endParaRPr lang="en-US"/>
           </a:p>
@@ -1344,7 +1344,7 @@
           <a:p>
             <a:fld id="{2D1FB5FC-1629-4A0D-9573-785FAC7ED015}" type="datetimeFigureOut">
               <a:rPr lang="en-US" smtClean="0"/>
-              <a:t>6/8/2026</a:t>
+              <a:t>6/13/2026</a:t>
             </a:fld>
             <a:endParaRPr lang="en-US"/>
           </a:p>
@@ -1711,7 +1711,7 @@
           <a:p>
             <a:fld id="{2D1FB5FC-1629-4A0D-9573-785FAC7ED015}" type="datetimeFigureOut">
               <a:rPr lang="en-US" smtClean="0"/>
-              <a:t>6/8/2026</a:t>
+              <a:t>6/13/2026</a:t>
             </a:fld>
             <a:endParaRPr lang="en-US"/>
           </a:p>
@@ -1829,7 +1829,7 @@
           <a:p>
             <a:fld id="{2D1FB5FC-1629-4A0D-9573-785FAC7ED015}" type="datetimeFigureOut">
               <a:rPr lang="en-US" smtClean="0"/>
-              <a:t>6/8/2026</a:t>
+              <a:t>6/13/2026</a:t>
             </a:fld>
             <a:endParaRPr lang="en-US"/>
           </a:p>
@@ -1924,7 +1924,7 @@
           <a:p>
             <a:fld id="{2D1FB5FC-1629-4A0D-9573-785FAC7ED015}" type="datetimeFigureOut">
               <a:rPr lang="en-US" smtClean="0"/>
-              <a:t>6/8/2026</a:t>
+              <a:t>6/13/2026</a:t>
             </a:fld>
             <a:endParaRPr lang="en-US"/>
           </a:p>
@@ -2201,7 +2201,7 @@
           <a:p>
             <a:fld id="{2D1FB5FC-1629-4A0D-9573-785FAC7ED015}" type="datetimeFigureOut">
               <a:rPr lang="en-US" smtClean="0"/>
-              <a:t>6/8/2026</a:t>
+              <a:t>6/13/2026</a:t>
             </a:fld>
             <a:endParaRPr lang="en-US"/>
           </a:p>
@@ -2458,7 +2458,7 @@
           <a:p>
             <a:fld id="{2D1FB5FC-1629-4A0D-9573-785FAC7ED015}" type="datetimeFigureOut">
               <a:rPr lang="en-US" smtClean="0"/>
-              <a:t>6/8/2026</a:t>
+              <a:t>6/13/2026</a:t>
             </a:fld>
             <a:endParaRPr lang="en-US"/>
           </a:p>
@@ -2671,7 +2671,7 @@
           <a:p>
             <a:fld id="{2D1FB5FC-1629-4A0D-9573-785FAC7ED015}" type="datetimeFigureOut">
               <a:rPr lang="en-US" smtClean="0"/>
-              <a:t>6/8/2026</a:t>
+              <a:t>6/13/2026</a:t>
             </a:fld>
             <a:endParaRPr lang="en-US"/>
           </a:p>
